--- a/CCOPilot_Product_Deck.pptx
+++ b/CCOPilot_Product_Deck.pptx
@@ -11,6 +11,7 @@
     <p:sldId id="256" r:id="rId2"/>
     <p:sldId id="257" r:id="rId3"/>
     <p:sldId id="258" r:id="rId4"/>
+    <p:sldId id="289" r:id="rId40"/>
     <p:sldId id="259" r:id="rId5"/>
     <p:sldId id="260" r:id="rId6"/>
     <p:sldId id="261" r:id="rId7"/>
@@ -14129,6 +14130,2621 @@
               <a:t>25+ years C-suite CS leadership  •  2 Fortune 500 acquisitions (IBM, ServiceNow)  •  Author: 'Your Customers Are Lying to You'</a:t>
             </a:r>
             <a:endParaRPr lang="en-US" sz="1000" dirty="0"/>
+          </a:p>
+        </p:txBody>
+      </p:sp>
+    </p:spTree>
+  </p:cSld>
+  <p:clrMapOvr>
+    <a:masterClrMapping/>
+  </p:clrMapOvr>
+</p:sld>
+</file>
+
+<file path=ppt/slides/slide34.xml><?xml version="1.0" encoding="utf-8"?>
+<p:sld xmlns:a="http://schemas.openxmlformats.org/drawingml/2006/main" xmlns:p="http://schemas.openxmlformats.org/presentationml/2006/main" xmlns:r="http://schemas.openxmlformats.org/officeDocument/2006/relationships">
+  <p:cSld>
+    <p:bg>
+      <p:bgPr>
+        <a:solidFill>
+          <a:srgbClr val="0F172A"/>
+        </a:solidFill>
+        <a:effectLst/>
+      </p:bgPr>
+    </p:bg>
+    <p:spTree>
+      <p:nvGrpSpPr>
+        <p:cNvPr id="1" name=""/>
+        <p:cNvGrpSpPr/>
+        <p:nvPr/>
+      </p:nvGrpSpPr>
+      <p:grpSpPr/>
+      <p:sp>
+        <p:nvSpPr>
+          <p:cNvPr id="2" name="TextBox 1"/>
+          <p:cNvSpPr txBox="1"/>
+          <p:nvPr/>
+        </p:nvSpPr>
+        <p:spPr>
+          <a:xfrm>
+            <a:off x="457200" y="137160"/>
+            <a:ext cx="8229600" cy="411480"/>
+          </a:xfrm>
+          <a:prstGeom prst="rect">
+            <a:avLst/>
+          </a:prstGeom>
+          <a:noFill/>
+        </p:spPr>
+        <p:txBody>
+          <a:bodyPr wrap="square">
+            <a:spAutoFit/>
+          </a:bodyPr>
+          <a:lstStyle/>
+          <a:p>
+            <a:pPr>
+              <a:defRPr sz="2200" b="1">
+                <a:solidFill>
+                  <a:srgbClr val="F8FAFC"/>
+                </a:solidFill>
+                <a:latin typeface="Arial"/>
+              </a:defRPr>
+            </a:pPr>
+            <a:r>
+              <a:t>CCOPilot across the post-sales lifecycle</a:t>
+            </a:r>
+          </a:p>
+        </p:txBody>
+      </p:sp>
+      <p:sp>
+        <p:nvSpPr>
+          <p:cNvPr id="3" name="TextBox 2"/>
+          <p:cNvSpPr txBox="1"/>
+          <p:nvPr/>
+        </p:nvSpPr>
+        <p:spPr>
+          <a:xfrm>
+            <a:off x="457200" y="502920"/>
+            <a:ext cx="8229600" cy="274320"/>
+          </a:xfrm>
+          <a:prstGeom prst="rect">
+            <a:avLst/>
+          </a:prstGeom>
+          <a:noFill/>
+        </p:spPr>
+        <p:txBody>
+          <a:bodyPr wrap="none">
+            <a:spAutoFit/>
+          </a:bodyPr>
+          <a:lstStyle/>
+          <a:p>
+            <a:pPr>
+              <a:defRPr sz="1200">
+                <a:solidFill>
+                  <a:srgbClr val="94A3B8"/>
+                </a:solidFill>
+                <a:latin typeface="Arial"/>
+              </a:defRPr>
+            </a:pPr>
+            <a:r>
+              <a:t>Every stage. Every signal. One platform.</a:t>
+            </a:r>
+          </a:p>
+        </p:txBody>
+      </p:sp>
+      <p:sp>
+        <p:nvSpPr>
+          <p:cNvPr id="4" name="Oval 3"/>
+          <p:cNvSpPr/>
+          <p:nvPr/>
+        </p:nvSpPr>
+        <p:spPr>
+          <a:xfrm>
+            <a:off x="493776" y="1051560"/>
+            <a:ext cx="109728" cy="109728"/>
+          </a:xfrm>
+          <a:prstGeom prst="ellipse">
+            <a:avLst/>
+          </a:prstGeom>
+          <a:solidFill>
+            <a:srgbClr val="3B82F6"/>
+          </a:solidFill>
+          <a:ln>
+            <a:noFill/>
+          </a:ln>
+        </p:spPr>
+        <p:style>
+          <a:lnRef idx="1">
+            <a:schemeClr val="accent1"/>
+          </a:lnRef>
+          <a:fillRef idx="3">
+            <a:schemeClr val="accent1"/>
+          </a:fillRef>
+          <a:effectRef idx="2">
+            <a:schemeClr val="accent1"/>
+          </a:effectRef>
+          <a:fontRef idx="minor">
+            <a:schemeClr val="lt1"/>
+          </a:fontRef>
+        </p:style>
+        <p:txBody>
+          <a:bodyPr rtlCol="0" anchor="ctr"/>
+          <a:lstStyle/>
+          <a:p>
+            <a:pPr algn="ctr"/>
+          </a:p>
+        </p:txBody>
+      </p:sp>
+      <p:sp>
+        <p:nvSpPr>
+          <p:cNvPr id="5" name="TextBox 4"/>
+          <p:cNvSpPr txBox="1"/>
+          <p:nvPr/>
+        </p:nvSpPr>
+        <p:spPr>
+          <a:xfrm>
+            <a:off x="45719" y="1216151"/>
+            <a:ext cx="1005840" cy="384048"/>
+          </a:xfrm>
+          <a:prstGeom prst="rect">
+            <a:avLst/>
+          </a:prstGeom>
+          <a:noFill/>
+        </p:spPr>
+        <p:txBody>
+          <a:bodyPr wrap="square">
+            <a:spAutoFit/>
+          </a:bodyPr>
+          <a:lstStyle/>
+          <a:p>
+            <a:pPr algn="ctr">
+              <a:defRPr sz="900" b="1">
+                <a:solidFill>
+                  <a:srgbClr val="F8FAFC"/>
+                </a:solidFill>
+                <a:latin typeface="Arial"/>
+              </a:defRPr>
+            </a:pPr>
+            <a:r>
+              <a:t>Sales</a:t>
+            </a:r>
+            <a:br/>
+            <a:r>
+              <a:t>handoff</a:t>
+            </a:r>
+          </a:p>
+        </p:txBody>
+      </p:sp>
+      <p:sp>
+        <p:nvSpPr>
+          <p:cNvPr id="6" name="Rounded Rectangle 5"/>
+          <p:cNvSpPr/>
+          <p:nvPr/>
+        </p:nvSpPr>
+        <p:spPr>
+          <a:xfrm>
+            <a:off x="68579" y="1783080"/>
+            <a:ext cx="960120" cy="2834640"/>
+          </a:xfrm>
+          <a:prstGeom prst="roundRect">
+            <a:avLst/>
+          </a:prstGeom>
+          <a:solidFill>
+            <a:srgbClr val="1E293B"/>
+          </a:solidFill>
+          <a:ln w="6350">
+            <a:solidFill>
+              <a:srgbClr val="3B82F6"/>
+            </a:solidFill>
+          </a:ln>
+        </p:spPr>
+        <p:style>
+          <a:lnRef idx="1">
+            <a:schemeClr val="accent1"/>
+          </a:lnRef>
+          <a:fillRef idx="3">
+            <a:schemeClr val="accent1"/>
+          </a:fillRef>
+          <a:effectRef idx="2">
+            <a:schemeClr val="accent1"/>
+          </a:effectRef>
+          <a:fontRef idx="minor">
+            <a:schemeClr val="lt1"/>
+          </a:fontRef>
+        </p:style>
+        <p:txBody>
+          <a:bodyPr rtlCol="0" anchor="ctr"/>
+          <a:lstStyle/>
+          <a:p>
+            <a:pPr algn="ctr"/>
+          </a:p>
+        </p:txBody>
+      </p:sp>
+      <p:sp>
+        <p:nvSpPr>
+          <p:cNvPr id="7" name="Rectangle 6"/>
+          <p:cNvSpPr/>
+          <p:nvPr/>
+        </p:nvSpPr>
+        <p:spPr>
+          <a:xfrm>
+            <a:off x="105155" y="1819656"/>
+            <a:ext cx="886968" cy="36576"/>
+          </a:xfrm>
+          <a:prstGeom prst="rect">
+            <a:avLst/>
+          </a:prstGeom>
+          <a:solidFill>
+            <a:srgbClr val="3B82F6"/>
+          </a:solidFill>
+          <a:ln>
+            <a:noFill/>
+          </a:ln>
+        </p:spPr>
+        <p:style>
+          <a:lnRef idx="1">
+            <a:schemeClr val="accent1"/>
+          </a:lnRef>
+          <a:fillRef idx="3">
+            <a:schemeClr val="accent1"/>
+          </a:fillRef>
+          <a:effectRef idx="2">
+            <a:schemeClr val="accent1"/>
+          </a:effectRef>
+          <a:fontRef idx="minor">
+            <a:schemeClr val="lt1"/>
+          </a:fontRef>
+        </p:style>
+        <p:txBody>
+          <a:bodyPr rtlCol="0" anchor="ctr"/>
+          <a:lstStyle/>
+          <a:p>
+            <a:pPr algn="ctr"/>
+          </a:p>
+        </p:txBody>
+      </p:sp>
+      <p:sp>
+        <p:nvSpPr>
+          <p:cNvPr id="8" name="TextBox 7"/>
+          <p:cNvSpPr txBox="1"/>
+          <p:nvPr/>
+        </p:nvSpPr>
+        <p:spPr>
+          <a:xfrm>
+            <a:off x="141731" y="1947672"/>
+            <a:ext cx="813816" cy="2560320"/>
+          </a:xfrm>
+          <a:prstGeom prst="rect">
+            <a:avLst/>
+          </a:prstGeom>
+          <a:noFill/>
+        </p:spPr>
+        <p:txBody>
+          <a:bodyPr wrap="square">
+            <a:spAutoFit/>
+          </a:bodyPr>
+          <a:lstStyle/>
+          <a:p>
+            <a:pPr>
+              <a:spcAft>
+                <a:spcPts val="300"/>
+              </a:spcAft>
+              <a:defRPr sz="850">
+                <a:solidFill>
+                  <a:srgbClr val="94A3B8"/>
+                </a:solidFill>
+                <a:latin typeface="Arial"/>
+              </a:defRPr>
+            </a:pPr>
+            <a:r>
+              <a:t>Customer DNA</a:t>
+            </a:r>
+          </a:p>
+          <a:p>
+            <a:pPr>
+              <a:spcAft>
+                <a:spcPts val="300"/>
+              </a:spcAft>
+              <a:defRPr sz="850">
+                <a:solidFill>
+                  <a:srgbClr val="94A3B8"/>
+                </a:solidFill>
+                <a:latin typeface="Arial"/>
+              </a:defRPr>
+            </a:pPr>
+            <a:r>
+              <a:t>Stakeholder mapping</a:t>
+            </a:r>
+          </a:p>
+          <a:p>
+            <a:pPr>
+              <a:spcAft>
+                <a:spcPts val="300"/>
+              </a:spcAft>
+              <a:defRPr sz="850">
+                <a:solidFill>
+                  <a:srgbClr val="94A3B8"/>
+                </a:solidFill>
+                <a:latin typeface="Arial"/>
+              </a:defRPr>
+            </a:pPr>
+            <a:r>
+              <a:t>Contact Intelligence</a:t>
+            </a:r>
+          </a:p>
+          <a:p>
+            <a:pPr>
+              <a:spcAft>
+                <a:spcPts val="300"/>
+              </a:spcAft>
+              <a:defRPr sz="850">
+                <a:solidFill>
+                  <a:srgbClr val="94A3B8"/>
+                </a:solidFill>
+                <a:latin typeface="Arial"/>
+              </a:defRPr>
+            </a:pPr>
+            <a:r>
+              <a:t>Success plans</a:t>
+            </a:r>
+          </a:p>
+          <a:p>
+            <a:pPr>
+              <a:spcAft>
+                <a:spcPts val="300"/>
+              </a:spcAft>
+              <a:defRPr sz="850">
+                <a:solidFill>
+                  <a:srgbClr val="94A3B8"/>
+                </a:solidFill>
+                <a:latin typeface="Arial"/>
+              </a:defRPr>
+            </a:pPr>
+            <a:r>
+              <a:t>CRM data sync</a:t>
+            </a:r>
+          </a:p>
+        </p:txBody>
+      </p:sp>
+      <p:sp>
+        <p:nvSpPr>
+          <p:cNvPr id="9" name="Rectangle 8"/>
+          <p:cNvSpPr/>
+          <p:nvPr/>
+        </p:nvSpPr>
+        <p:spPr>
+          <a:xfrm>
+            <a:off x="603504" y="1097280"/>
+            <a:ext cx="941831" cy="18288"/>
+          </a:xfrm>
+          <a:prstGeom prst="rect">
+            <a:avLst/>
+          </a:prstGeom>
+          <a:solidFill>
+            <a:srgbClr val="334155"/>
+          </a:solidFill>
+          <a:ln>
+            <a:noFill/>
+          </a:ln>
+        </p:spPr>
+        <p:style>
+          <a:lnRef idx="1">
+            <a:schemeClr val="accent1"/>
+          </a:lnRef>
+          <a:fillRef idx="3">
+            <a:schemeClr val="accent1"/>
+          </a:fillRef>
+          <a:effectRef idx="2">
+            <a:schemeClr val="accent1"/>
+          </a:effectRef>
+          <a:fontRef idx="minor">
+            <a:schemeClr val="lt1"/>
+          </a:fontRef>
+        </p:style>
+        <p:txBody>
+          <a:bodyPr rtlCol="0" anchor="ctr"/>
+          <a:lstStyle/>
+          <a:p>
+            <a:pPr algn="ctr"/>
+          </a:p>
+        </p:txBody>
+      </p:sp>
+      <p:sp>
+        <p:nvSpPr>
+          <p:cNvPr id="10" name="Oval 9"/>
+          <p:cNvSpPr/>
+          <p:nvPr/>
+        </p:nvSpPr>
+        <p:spPr>
+          <a:xfrm>
+            <a:off x="1545336" y="1051560"/>
+            <a:ext cx="109728" cy="109728"/>
+          </a:xfrm>
+          <a:prstGeom prst="ellipse">
+            <a:avLst/>
+          </a:prstGeom>
+          <a:solidFill>
+            <a:srgbClr val="059669"/>
+          </a:solidFill>
+          <a:ln>
+            <a:noFill/>
+          </a:ln>
+        </p:spPr>
+        <p:style>
+          <a:lnRef idx="1">
+            <a:schemeClr val="accent1"/>
+          </a:lnRef>
+          <a:fillRef idx="3">
+            <a:schemeClr val="accent1"/>
+          </a:fillRef>
+          <a:effectRef idx="2">
+            <a:schemeClr val="accent1"/>
+          </a:effectRef>
+          <a:fontRef idx="minor">
+            <a:schemeClr val="lt1"/>
+          </a:fontRef>
+        </p:style>
+        <p:txBody>
+          <a:bodyPr rtlCol="0" anchor="ctr"/>
+          <a:lstStyle/>
+          <a:p>
+            <a:pPr algn="ctr"/>
+          </a:p>
+        </p:txBody>
+      </p:sp>
+      <p:sp>
+        <p:nvSpPr>
+          <p:cNvPr id="11" name="TextBox 10"/>
+          <p:cNvSpPr txBox="1"/>
+          <p:nvPr/>
+        </p:nvSpPr>
+        <p:spPr>
+          <a:xfrm>
+            <a:off x="1097280" y="1216151"/>
+            <a:ext cx="1005840" cy="384048"/>
+          </a:xfrm>
+          <a:prstGeom prst="rect">
+            <a:avLst/>
+          </a:prstGeom>
+          <a:noFill/>
+        </p:spPr>
+        <p:txBody>
+          <a:bodyPr wrap="square">
+            <a:spAutoFit/>
+          </a:bodyPr>
+          <a:lstStyle/>
+          <a:p>
+            <a:pPr algn="ctr">
+              <a:defRPr sz="900" b="1">
+                <a:solidFill>
+                  <a:srgbClr val="F8FAFC"/>
+                </a:solidFill>
+                <a:latin typeface="Arial"/>
+              </a:defRPr>
+            </a:pPr>
+            <a:r>
+              <a:t>Onboarding</a:t>
+            </a:r>
+          </a:p>
+        </p:txBody>
+      </p:sp>
+      <p:sp>
+        <p:nvSpPr>
+          <p:cNvPr id="12" name="Rounded Rectangle 11"/>
+          <p:cNvSpPr/>
+          <p:nvPr/>
+        </p:nvSpPr>
+        <p:spPr>
+          <a:xfrm>
+            <a:off x="1120140" y="1783080"/>
+            <a:ext cx="960120" cy="2834640"/>
+          </a:xfrm>
+          <a:prstGeom prst="roundRect">
+            <a:avLst/>
+          </a:prstGeom>
+          <a:solidFill>
+            <a:srgbClr val="1E293B"/>
+          </a:solidFill>
+          <a:ln w="6350">
+            <a:solidFill>
+              <a:srgbClr val="059669"/>
+            </a:solidFill>
+          </a:ln>
+        </p:spPr>
+        <p:style>
+          <a:lnRef idx="1">
+            <a:schemeClr val="accent1"/>
+          </a:lnRef>
+          <a:fillRef idx="3">
+            <a:schemeClr val="accent1"/>
+          </a:fillRef>
+          <a:effectRef idx="2">
+            <a:schemeClr val="accent1"/>
+          </a:effectRef>
+          <a:fontRef idx="minor">
+            <a:schemeClr val="lt1"/>
+          </a:fontRef>
+        </p:style>
+        <p:txBody>
+          <a:bodyPr rtlCol="0" anchor="ctr"/>
+          <a:lstStyle/>
+          <a:p>
+            <a:pPr algn="ctr"/>
+          </a:p>
+        </p:txBody>
+      </p:sp>
+      <p:sp>
+        <p:nvSpPr>
+          <p:cNvPr id="13" name="Rectangle 12"/>
+          <p:cNvSpPr/>
+          <p:nvPr/>
+        </p:nvSpPr>
+        <p:spPr>
+          <a:xfrm>
+            <a:off x="1156716" y="1819656"/>
+            <a:ext cx="886968" cy="36576"/>
+          </a:xfrm>
+          <a:prstGeom prst="rect">
+            <a:avLst/>
+          </a:prstGeom>
+          <a:solidFill>
+            <a:srgbClr val="059669"/>
+          </a:solidFill>
+          <a:ln>
+            <a:noFill/>
+          </a:ln>
+        </p:spPr>
+        <p:style>
+          <a:lnRef idx="1">
+            <a:schemeClr val="accent1"/>
+          </a:lnRef>
+          <a:fillRef idx="3">
+            <a:schemeClr val="accent1"/>
+          </a:fillRef>
+          <a:effectRef idx="2">
+            <a:schemeClr val="accent1"/>
+          </a:effectRef>
+          <a:fontRef idx="minor">
+            <a:schemeClr val="lt1"/>
+          </a:fontRef>
+        </p:style>
+        <p:txBody>
+          <a:bodyPr rtlCol="0" anchor="ctr"/>
+          <a:lstStyle/>
+          <a:p>
+            <a:pPr algn="ctr"/>
+          </a:p>
+        </p:txBody>
+      </p:sp>
+      <p:sp>
+        <p:nvSpPr>
+          <p:cNvPr id="14" name="TextBox 13"/>
+          <p:cNvSpPr txBox="1"/>
+          <p:nvPr/>
+        </p:nvSpPr>
+        <p:spPr>
+          <a:xfrm>
+            <a:off x="1193292" y="1947672"/>
+            <a:ext cx="813816" cy="2560320"/>
+          </a:xfrm>
+          <a:prstGeom prst="rect">
+            <a:avLst/>
+          </a:prstGeom>
+          <a:noFill/>
+        </p:spPr>
+        <p:txBody>
+          <a:bodyPr wrap="square">
+            <a:spAutoFit/>
+          </a:bodyPr>
+          <a:lstStyle/>
+          <a:p>
+            <a:pPr>
+              <a:spcAft>
+                <a:spcPts val="300"/>
+              </a:spcAft>
+              <a:defRPr sz="850">
+                <a:solidFill>
+                  <a:srgbClr val="94A3B8"/>
+                </a:solidFill>
+                <a:latin typeface="Arial"/>
+              </a:defRPr>
+            </a:pPr>
+            <a:r>
+              <a:t>T2FV tracking</a:t>
+            </a:r>
+          </a:p>
+          <a:p>
+            <a:pPr>
+              <a:spcAft>
+                <a:spcPts val="300"/>
+              </a:spcAft>
+              <a:defRPr sz="850">
+                <a:solidFill>
+                  <a:srgbClr val="94A3B8"/>
+                </a:solidFill>
+                <a:latin typeface="Arial"/>
+              </a:defRPr>
+            </a:pPr>
+            <a:r>
+              <a:t>Onboarding playbooks</a:t>
+            </a:r>
+          </a:p>
+          <a:p>
+            <a:pPr>
+              <a:spcAft>
+                <a:spcPts val="300"/>
+              </a:spcAft>
+              <a:defRPr sz="850">
+                <a:solidFill>
+                  <a:srgbClr val="94A3B8"/>
+                </a:solidFill>
+                <a:latin typeface="Arial"/>
+              </a:defRPr>
+            </a:pPr>
+            <a:r>
+              <a:t>Milestone tracking</a:t>
+            </a:r>
+          </a:p>
+          <a:p>
+            <a:pPr>
+              <a:spcAft>
+                <a:spcPts val="300"/>
+              </a:spcAft>
+              <a:defRPr sz="850">
+                <a:solidFill>
+                  <a:srgbClr val="94A3B8"/>
+                </a:solidFill>
+                <a:latin typeface="Arial"/>
+              </a:defRPr>
+            </a:pPr>
+            <a:r>
+              <a:t>Adoption baseline</a:t>
+            </a:r>
+          </a:p>
+          <a:p>
+            <a:pPr>
+              <a:spcAft>
+                <a:spcPts val="300"/>
+              </a:spcAft>
+              <a:defRPr sz="850">
+                <a:solidFill>
+                  <a:srgbClr val="94A3B8"/>
+                </a:solidFill>
+                <a:latin typeface="Arial"/>
+              </a:defRPr>
+            </a:pPr>
+            <a:r>
+              <a:t>Onboarding agents</a:t>
+            </a:r>
+          </a:p>
+        </p:txBody>
+      </p:sp>
+      <p:sp>
+        <p:nvSpPr>
+          <p:cNvPr id="15" name="Rectangle 14"/>
+          <p:cNvSpPr/>
+          <p:nvPr/>
+        </p:nvSpPr>
+        <p:spPr>
+          <a:xfrm>
+            <a:off x="1655064" y="1097280"/>
+            <a:ext cx="941831" cy="18288"/>
+          </a:xfrm>
+          <a:prstGeom prst="rect">
+            <a:avLst/>
+          </a:prstGeom>
+          <a:solidFill>
+            <a:srgbClr val="334155"/>
+          </a:solidFill>
+          <a:ln>
+            <a:noFill/>
+          </a:ln>
+        </p:spPr>
+        <p:style>
+          <a:lnRef idx="1">
+            <a:schemeClr val="accent1"/>
+          </a:lnRef>
+          <a:fillRef idx="3">
+            <a:schemeClr val="accent1"/>
+          </a:fillRef>
+          <a:effectRef idx="2">
+            <a:schemeClr val="accent1"/>
+          </a:effectRef>
+          <a:fontRef idx="minor">
+            <a:schemeClr val="lt1"/>
+          </a:fontRef>
+        </p:style>
+        <p:txBody>
+          <a:bodyPr rtlCol="0" anchor="ctr"/>
+          <a:lstStyle/>
+          <a:p>
+            <a:pPr algn="ctr"/>
+          </a:p>
+        </p:txBody>
+      </p:sp>
+      <p:sp>
+        <p:nvSpPr>
+          <p:cNvPr id="16" name="Oval 15"/>
+          <p:cNvSpPr/>
+          <p:nvPr/>
+        </p:nvSpPr>
+        <p:spPr>
+          <a:xfrm>
+            <a:off x="2596896" y="1051560"/>
+            <a:ext cx="109728" cy="109728"/>
+          </a:xfrm>
+          <a:prstGeom prst="ellipse">
+            <a:avLst/>
+          </a:prstGeom>
+          <a:solidFill>
+            <a:srgbClr val="65A30D"/>
+          </a:solidFill>
+          <a:ln>
+            <a:noFill/>
+          </a:ln>
+        </p:spPr>
+        <p:style>
+          <a:lnRef idx="1">
+            <a:schemeClr val="accent1"/>
+          </a:lnRef>
+          <a:fillRef idx="3">
+            <a:schemeClr val="accent1"/>
+          </a:fillRef>
+          <a:effectRef idx="2">
+            <a:schemeClr val="accent1"/>
+          </a:effectRef>
+          <a:fontRef idx="minor">
+            <a:schemeClr val="lt1"/>
+          </a:fontRef>
+        </p:style>
+        <p:txBody>
+          <a:bodyPr rtlCol="0" anchor="ctr"/>
+          <a:lstStyle/>
+          <a:p>
+            <a:pPr algn="ctr"/>
+          </a:p>
+        </p:txBody>
+      </p:sp>
+      <p:sp>
+        <p:nvSpPr>
+          <p:cNvPr id="17" name="TextBox 16"/>
+          <p:cNvSpPr txBox="1"/>
+          <p:nvPr/>
+        </p:nvSpPr>
+        <p:spPr>
+          <a:xfrm>
+            <a:off x="2148839" y="1216151"/>
+            <a:ext cx="1005840" cy="384048"/>
+          </a:xfrm>
+          <a:prstGeom prst="rect">
+            <a:avLst/>
+          </a:prstGeom>
+          <a:noFill/>
+        </p:spPr>
+        <p:txBody>
+          <a:bodyPr wrap="square">
+            <a:spAutoFit/>
+          </a:bodyPr>
+          <a:lstStyle/>
+          <a:p>
+            <a:pPr algn="ctr">
+              <a:defRPr sz="900" b="1">
+                <a:solidFill>
+                  <a:srgbClr val="F8FAFC"/>
+                </a:solidFill>
+                <a:latin typeface="Arial"/>
+              </a:defRPr>
+            </a:pPr>
+            <a:r>
+              <a:t>Adoption</a:t>
+            </a:r>
+          </a:p>
+        </p:txBody>
+      </p:sp>
+      <p:sp>
+        <p:nvSpPr>
+          <p:cNvPr id="18" name="Rounded Rectangle 17"/>
+          <p:cNvSpPr/>
+          <p:nvPr/>
+        </p:nvSpPr>
+        <p:spPr>
+          <a:xfrm>
+            <a:off x="2171700" y="1783080"/>
+            <a:ext cx="960120" cy="2834640"/>
+          </a:xfrm>
+          <a:prstGeom prst="roundRect">
+            <a:avLst/>
+          </a:prstGeom>
+          <a:solidFill>
+            <a:srgbClr val="1E293B"/>
+          </a:solidFill>
+          <a:ln w="6350">
+            <a:solidFill>
+              <a:srgbClr val="65A30D"/>
+            </a:solidFill>
+          </a:ln>
+        </p:spPr>
+        <p:style>
+          <a:lnRef idx="1">
+            <a:schemeClr val="accent1"/>
+          </a:lnRef>
+          <a:fillRef idx="3">
+            <a:schemeClr val="accent1"/>
+          </a:fillRef>
+          <a:effectRef idx="2">
+            <a:schemeClr val="accent1"/>
+          </a:effectRef>
+          <a:fontRef idx="minor">
+            <a:schemeClr val="lt1"/>
+          </a:fontRef>
+        </p:style>
+        <p:txBody>
+          <a:bodyPr rtlCol="0" anchor="ctr"/>
+          <a:lstStyle/>
+          <a:p>
+            <a:pPr algn="ctr"/>
+          </a:p>
+        </p:txBody>
+      </p:sp>
+      <p:sp>
+        <p:nvSpPr>
+          <p:cNvPr id="19" name="Rectangle 18"/>
+          <p:cNvSpPr/>
+          <p:nvPr/>
+        </p:nvSpPr>
+        <p:spPr>
+          <a:xfrm>
+            <a:off x="2208276" y="1819656"/>
+            <a:ext cx="886968" cy="36576"/>
+          </a:xfrm>
+          <a:prstGeom prst="rect">
+            <a:avLst/>
+          </a:prstGeom>
+          <a:solidFill>
+            <a:srgbClr val="65A30D"/>
+          </a:solidFill>
+          <a:ln>
+            <a:noFill/>
+          </a:ln>
+        </p:spPr>
+        <p:style>
+          <a:lnRef idx="1">
+            <a:schemeClr val="accent1"/>
+          </a:lnRef>
+          <a:fillRef idx="3">
+            <a:schemeClr val="accent1"/>
+          </a:fillRef>
+          <a:effectRef idx="2">
+            <a:schemeClr val="accent1"/>
+          </a:effectRef>
+          <a:fontRef idx="minor">
+            <a:schemeClr val="lt1"/>
+          </a:fontRef>
+        </p:style>
+        <p:txBody>
+          <a:bodyPr rtlCol="0" anchor="ctr"/>
+          <a:lstStyle/>
+          <a:p>
+            <a:pPr algn="ctr"/>
+          </a:p>
+        </p:txBody>
+      </p:sp>
+      <p:sp>
+        <p:nvSpPr>
+          <p:cNvPr id="20" name="TextBox 19"/>
+          <p:cNvSpPr txBox="1"/>
+          <p:nvPr/>
+        </p:nvSpPr>
+        <p:spPr>
+          <a:xfrm>
+            <a:off x="2244852" y="1947672"/>
+            <a:ext cx="813816" cy="2560320"/>
+          </a:xfrm>
+          <a:prstGeom prst="rect">
+            <a:avLst/>
+          </a:prstGeom>
+          <a:noFill/>
+        </p:spPr>
+        <p:txBody>
+          <a:bodyPr wrap="square">
+            <a:spAutoFit/>
+          </a:bodyPr>
+          <a:lstStyle/>
+          <a:p>
+            <a:pPr>
+              <a:spcAft>
+                <a:spcPts val="300"/>
+              </a:spcAft>
+              <a:defRPr sz="850">
+                <a:solidFill>
+                  <a:srgbClr val="94A3B8"/>
+                </a:solidFill>
+                <a:latin typeface="Arial"/>
+              </a:defRPr>
+            </a:pPr>
+            <a:r>
+              <a:t>Feature adoption intel</a:t>
+            </a:r>
+          </a:p>
+          <a:p>
+            <a:pPr>
+              <a:spcAft>
+                <a:spcPts val="300"/>
+              </a:spcAft>
+              <a:defRPr sz="850">
+                <a:solidFill>
+                  <a:srgbClr val="94A3B8"/>
+                </a:solidFill>
+                <a:latin typeface="Arial"/>
+              </a:defRPr>
+            </a:pPr>
+            <a:r>
+              <a:t>Nudge engine</a:t>
+            </a:r>
+          </a:p>
+          <a:p>
+            <a:pPr>
+              <a:spcAft>
+                <a:spcPts val="300"/>
+              </a:spcAft>
+              <a:defRPr sz="850">
+                <a:solidFill>
+                  <a:srgbClr val="94A3B8"/>
+                </a:solidFill>
+                <a:latin typeface="Arial"/>
+              </a:defRPr>
+            </a:pPr>
+            <a:r>
+              <a:t>Usage monitoring</a:t>
+            </a:r>
+          </a:p>
+          <a:p>
+            <a:pPr>
+              <a:spcAft>
+                <a:spcPts val="300"/>
+              </a:spcAft>
+              <a:defRPr sz="850">
+                <a:solidFill>
+                  <a:srgbClr val="94A3B8"/>
+                </a:solidFill>
+                <a:latin typeface="Arial"/>
+              </a:defRPr>
+            </a:pPr>
+            <a:r>
+              <a:t>Review triggers</a:t>
+            </a:r>
+          </a:p>
+          <a:p>
+            <a:pPr>
+              <a:spcAft>
+                <a:spcPts val="300"/>
+              </a:spcAft>
+              <a:defRPr sz="850">
+                <a:solidFill>
+                  <a:srgbClr val="94A3B8"/>
+                </a:solidFill>
+                <a:latin typeface="Arial"/>
+              </a:defRPr>
+            </a:pPr>
+            <a:r>
+              <a:t>FAR scoring</a:t>
+            </a:r>
+          </a:p>
+        </p:txBody>
+      </p:sp>
+      <p:sp>
+        <p:nvSpPr>
+          <p:cNvPr id="21" name="Rectangle 20"/>
+          <p:cNvSpPr/>
+          <p:nvPr/>
+        </p:nvSpPr>
+        <p:spPr>
+          <a:xfrm>
+            <a:off x="2706624" y="1097280"/>
+            <a:ext cx="941831" cy="18288"/>
+          </a:xfrm>
+          <a:prstGeom prst="rect">
+            <a:avLst/>
+          </a:prstGeom>
+          <a:solidFill>
+            <a:srgbClr val="334155"/>
+          </a:solidFill>
+          <a:ln>
+            <a:noFill/>
+          </a:ln>
+        </p:spPr>
+        <p:style>
+          <a:lnRef idx="1">
+            <a:schemeClr val="accent1"/>
+          </a:lnRef>
+          <a:fillRef idx="3">
+            <a:schemeClr val="accent1"/>
+          </a:fillRef>
+          <a:effectRef idx="2">
+            <a:schemeClr val="accent1"/>
+          </a:effectRef>
+          <a:fontRef idx="minor">
+            <a:schemeClr val="lt1"/>
+          </a:fontRef>
+        </p:style>
+        <p:txBody>
+          <a:bodyPr rtlCol="0" anchor="ctr"/>
+          <a:lstStyle/>
+          <a:p>
+            <a:pPr algn="ctr"/>
+          </a:p>
+        </p:txBody>
+      </p:sp>
+      <p:sp>
+        <p:nvSpPr>
+          <p:cNvPr id="22" name="Oval 21"/>
+          <p:cNvSpPr/>
+          <p:nvPr/>
+        </p:nvSpPr>
+        <p:spPr>
+          <a:xfrm>
+            <a:off x="3648456" y="1051560"/>
+            <a:ext cx="109728" cy="109728"/>
+          </a:xfrm>
+          <a:prstGeom prst="ellipse">
+            <a:avLst/>
+          </a:prstGeom>
+          <a:solidFill>
+            <a:srgbClr val="6B7280"/>
+          </a:solidFill>
+          <a:ln>
+            <a:noFill/>
+          </a:ln>
+        </p:spPr>
+        <p:style>
+          <a:lnRef idx="1">
+            <a:schemeClr val="accent1"/>
+          </a:lnRef>
+          <a:fillRef idx="3">
+            <a:schemeClr val="accent1"/>
+          </a:fillRef>
+          <a:effectRef idx="2">
+            <a:schemeClr val="accent1"/>
+          </a:effectRef>
+          <a:fontRef idx="minor">
+            <a:schemeClr val="lt1"/>
+          </a:fontRef>
+        </p:style>
+        <p:txBody>
+          <a:bodyPr rtlCol="0" anchor="ctr"/>
+          <a:lstStyle/>
+          <a:p>
+            <a:pPr algn="ctr"/>
+          </a:p>
+        </p:txBody>
+      </p:sp>
+      <p:sp>
+        <p:nvSpPr>
+          <p:cNvPr id="23" name="TextBox 22"/>
+          <p:cNvSpPr txBox="1"/>
+          <p:nvPr/>
+        </p:nvSpPr>
+        <p:spPr>
+          <a:xfrm>
+            <a:off x="3200400" y="1216151"/>
+            <a:ext cx="1005840" cy="384048"/>
+          </a:xfrm>
+          <a:prstGeom prst="rect">
+            <a:avLst/>
+          </a:prstGeom>
+          <a:noFill/>
+        </p:spPr>
+        <p:txBody>
+          <a:bodyPr wrap="square">
+            <a:spAutoFit/>
+          </a:bodyPr>
+          <a:lstStyle/>
+          <a:p>
+            <a:pPr algn="ctr">
+              <a:defRPr sz="900" b="1">
+                <a:solidFill>
+                  <a:srgbClr val="F8FAFC"/>
+                </a:solidFill>
+                <a:latin typeface="Arial"/>
+              </a:defRPr>
+            </a:pPr>
+            <a:r>
+              <a:t>Steady</a:t>
+            </a:r>
+            <a:br/>
+            <a:r>
+              <a:t>state</a:t>
+            </a:r>
+          </a:p>
+        </p:txBody>
+      </p:sp>
+      <p:sp>
+        <p:nvSpPr>
+          <p:cNvPr id="24" name="Rounded Rectangle 23"/>
+          <p:cNvSpPr/>
+          <p:nvPr/>
+        </p:nvSpPr>
+        <p:spPr>
+          <a:xfrm>
+            <a:off x="3223260" y="1783080"/>
+            <a:ext cx="960120" cy="2834640"/>
+          </a:xfrm>
+          <a:prstGeom prst="roundRect">
+            <a:avLst/>
+          </a:prstGeom>
+          <a:solidFill>
+            <a:srgbClr val="1E293B"/>
+          </a:solidFill>
+          <a:ln w="6350">
+            <a:solidFill>
+              <a:srgbClr val="6B7280"/>
+            </a:solidFill>
+          </a:ln>
+        </p:spPr>
+        <p:style>
+          <a:lnRef idx="1">
+            <a:schemeClr val="accent1"/>
+          </a:lnRef>
+          <a:fillRef idx="3">
+            <a:schemeClr val="accent1"/>
+          </a:fillRef>
+          <a:effectRef idx="2">
+            <a:schemeClr val="accent1"/>
+          </a:effectRef>
+          <a:fontRef idx="minor">
+            <a:schemeClr val="lt1"/>
+          </a:fontRef>
+        </p:style>
+        <p:txBody>
+          <a:bodyPr rtlCol="0" anchor="ctr"/>
+          <a:lstStyle/>
+          <a:p>
+            <a:pPr algn="ctr"/>
+          </a:p>
+        </p:txBody>
+      </p:sp>
+      <p:sp>
+        <p:nvSpPr>
+          <p:cNvPr id="25" name="Rectangle 24"/>
+          <p:cNvSpPr/>
+          <p:nvPr/>
+        </p:nvSpPr>
+        <p:spPr>
+          <a:xfrm>
+            <a:off x="3259836" y="1819656"/>
+            <a:ext cx="886968" cy="36576"/>
+          </a:xfrm>
+          <a:prstGeom prst="rect">
+            <a:avLst/>
+          </a:prstGeom>
+          <a:solidFill>
+            <a:srgbClr val="6B7280"/>
+          </a:solidFill>
+          <a:ln>
+            <a:noFill/>
+          </a:ln>
+        </p:spPr>
+        <p:style>
+          <a:lnRef idx="1">
+            <a:schemeClr val="accent1"/>
+          </a:lnRef>
+          <a:fillRef idx="3">
+            <a:schemeClr val="accent1"/>
+          </a:fillRef>
+          <a:effectRef idx="2">
+            <a:schemeClr val="accent1"/>
+          </a:effectRef>
+          <a:fontRef idx="minor">
+            <a:schemeClr val="lt1"/>
+          </a:fontRef>
+        </p:style>
+        <p:txBody>
+          <a:bodyPr rtlCol="0" anchor="ctr"/>
+          <a:lstStyle/>
+          <a:p>
+            <a:pPr algn="ctr"/>
+          </a:p>
+        </p:txBody>
+      </p:sp>
+      <p:sp>
+        <p:nvSpPr>
+          <p:cNvPr id="26" name="TextBox 25"/>
+          <p:cNvSpPr txBox="1"/>
+          <p:nvPr/>
+        </p:nvSpPr>
+        <p:spPr>
+          <a:xfrm>
+            <a:off x="3296412" y="1947672"/>
+            <a:ext cx="813816" cy="2560320"/>
+          </a:xfrm>
+          <a:prstGeom prst="rect">
+            <a:avLst/>
+          </a:prstGeom>
+          <a:noFill/>
+        </p:spPr>
+        <p:txBody>
+          <a:bodyPr wrap="square">
+            <a:spAutoFit/>
+          </a:bodyPr>
+          <a:lstStyle/>
+          <a:p>
+            <a:pPr>
+              <a:spcAft>
+                <a:spcPts val="300"/>
+              </a:spcAft>
+              <a:defRPr sz="850">
+                <a:solidFill>
+                  <a:srgbClr val="94A3B8"/>
+                </a:solidFill>
+                <a:latin typeface="Arial"/>
+              </a:defRPr>
+            </a:pPr>
+            <a:r>
+              <a:t>AI daily queue</a:t>
+            </a:r>
+          </a:p>
+          <a:p>
+            <a:pPr>
+              <a:spcAft>
+                <a:spcPts val="300"/>
+              </a:spcAft>
+              <a:defRPr sz="850">
+                <a:solidFill>
+                  <a:srgbClr val="94A3B8"/>
+                </a:solidFill>
+                <a:latin typeface="Arial"/>
+              </a:defRPr>
+            </a:pPr>
+            <a:r>
+              <a:t>20 AI agents 24/7</a:t>
+            </a:r>
+          </a:p>
+          <a:p>
+            <a:pPr>
+              <a:spcAft>
+                <a:spcPts val="300"/>
+              </a:spcAft>
+              <a:defRPr sz="850">
+                <a:solidFill>
+                  <a:srgbClr val="94A3B8"/>
+                </a:solidFill>
+                <a:latin typeface="Arial"/>
+              </a:defRPr>
+            </a:pPr>
+            <a:r>
+              <a:t>Sentiment analysis</a:t>
+            </a:r>
+          </a:p>
+          <a:p>
+            <a:pPr>
+              <a:spcAft>
+                <a:spcPts val="300"/>
+              </a:spcAft>
+              <a:defRPr sz="850">
+                <a:solidFill>
+                  <a:srgbClr val="94A3B8"/>
+                </a:solidFill>
+                <a:latin typeface="Arial"/>
+              </a:defRPr>
+            </a:pPr>
+            <a:r>
+              <a:t>Engagement velocity</a:t>
+            </a:r>
+          </a:p>
+          <a:p>
+            <a:pPr>
+              <a:spcAft>
+                <a:spcPts val="300"/>
+              </a:spcAft>
+              <a:defRPr sz="850">
+                <a:solidFill>
+                  <a:srgbClr val="94A3B8"/>
+                </a:solidFill>
+                <a:latin typeface="Arial"/>
+              </a:defRPr>
+            </a:pPr>
+            <a:r>
+              <a:t>VPC surveys</a:t>
+            </a:r>
+          </a:p>
+          <a:p>
+            <a:pPr>
+              <a:spcAft>
+                <a:spcPts val="300"/>
+              </a:spcAft>
+              <a:defRPr sz="850">
+                <a:solidFill>
+                  <a:srgbClr val="94A3B8"/>
+                </a:solidFill>
+                <a:latin typeface="Arial"/>
+              </a:defRPr>
+            </a:pPr>
+            <a:r>
+              <a:t>Support monitoring</a:t>
+            </a:r>
+          </a:p>
+        </p:txBody>
+      </p:sp>
+      <p:sp>
+        <p:nvSpPr>
+          <p:cNvPr id="27" name="Rectangle 26"/>
+          <p:cNvSpPr/>
+          <p:nvPr/>
+        </p:nvSpPr>
+        <p:spPr>
+          <a:xfrm>
+            <a:off x="3758183" y="1097280"/>
+            <a:ext cx="941831" cy="18288"/>
+          </a:xfrm>
+          <a:prstGeom prst="rect">
+            <a:avLst/>
+          </a:prstGeom>
+          <a:solidFill>
+            <a:srgbClr val="334155"/>
+          </a:solidFill>
+          <a:ln>
+            <a:noFill/>
+          </a:ln>
+        </p:spPr>
+        <p:style>
+          <a:lnRef idx="1">
+            <a:schemeClr val="accent1"/>
+          </a:lnRef>
+          <a:fillRef idx="3">
+            <a:schemeClr val="accent1"/>
+          </a:fillRef>
+          <a:effectRef idx="2">
+            <a:schemeClr val="accent1"/>
+          </a:effectRef>
+          <a:fontRef idx="minor">
+            <a:schemeClr val="lt1"/>
+          </a:fontRef>
+        </p:style>
+        <p:txBody>
+          <a:bodyPr rtlCol="0" anchor="ctr"/>
+          <a:lstStyle/>
+          <a:p>
+            <a:pPr algn="ctr"/>
+          </a:p>
+        </p:txBody>
+      </p:sp>
+      <p:sp>
+        <p:nvSpPr>
+          <p:cNvPr id="28" name="Oval 27"/>
+          <p:cNvSpPr/>
+          <p:nvPr/>
+        </p:nvSpPr>
+        <p:spPr>
+          <a:xfrm>
+            <a:off x="4700016" y="1051560"/>
+            <a:ext cx="109728" cy="109728"/>
+          </a:xfrm>
+          <a:prstGeom prst="ellipse">
+            <a:avLst/>
+          </a:prstGeom>
+          <a:solidFill>
+            <a:srgbClr val="F59E0B"/>
+          </a:solidFill>
+          <a:ln>
+            <a:noFill/>
+          </a:ln>
+        </p:spPr>
+        <p:style>
+          <a:lnRef idx="1">
+            <a:schemeClr val="accent1"/>
+          </a:lnRef>
+          <a:fillRef idx="3">
+            <a:schemeClr val="accent1"/>
+          </a:fillRef>
+          <a:effectRef idx="2">
+            <a:schemeClr val="accent1"/>
+          </a:effectRef>
+          <a:fontRef idx="minor">
+            <a:schemeClr val="lt1"/>
+          </a:fontRef>
+        </p:style>
+        <p:txBody>
+          <a:bodyPr rtlCol="0" anchor="ctr"/>
+          <a:lstStyle/>
+          <a:p>
+            <a:pPr algn="ctr"/>
+          </a:p>
+        </p:txBody>
+      </p:sp>
+      <p:sp>
+        <p:nvSpPr>
+          <p:cNvPr id="29" name="TextBox 28"/>
+          <p:cNvSpPr txBox="1"/>
+          <p:nvPr/>
+        </p:nvSpPr>
+        <p:spPr>
+          <a:xfrm>
+            <a:off x="4251959" y="1216151"/>
+            <a:ext cx="1005840" cy="384048"/>
+          </a:xfrm>
+          <a:prstGeom prst="rect">
+            <a:avLst/>
+          </a:prstGeom>
+          <a:noFill/>
+        </p:spPr>
+        <p:txBody>
+          <a:bodyPr wrap="square">
+            <a:spAutoFit/>
+          </a:bodyPr>
+          <a:lstStyle/>
+          <a:p>
+            <a:pPr algn="ctr">
+              <a:defRPr sz="900" b="1">
+                <a:solidFill>
+                  <a:srgbClr val="F8FAFC"/>
+                </a:solidFill>
+                <a:latin typeface="Arial"/>
+              </a:defRPr>
+            </a:pPr>
+            <a:r>
+              <a:t>Renewal</a:t>
+            </a:r>
+            <a:br/>
+            <a:r>
+              <a:t>prep</a:t>
+            </a:r>
+          </a:p>
+        </p:txBody>
+      </p:sp>
+      <p:sp>
+        <p:nvSpPr>
+          <p:cNvPr id="30" name="Rounded Rectangle 29"/>
+          <p:cNvSpPr/>
+          <p:nvPr/>
+        </p:nvSpPr>
+        <p:spPr>
+          <a:xfrm>
+            <a:off x="4274819" y="1783080"/>
+            <a:ext cx="960120" cy="2834640"/>
+          </a:xfrm>
+          <a:prstGeom prst="roundRect">
+            <a:avLst/>
+          </a:prstGeom>
+          <a:solidFill>
+            <a:srgbClr val="1E293B"/>
+          </a:solidFill>
+          <a:ln w="6350">
+            <a:solidFill>
+              <a:srgbClr val="F59E0B"/>
+            </a:solidFill>
+          </a:ln>
+        </p:spPr>
+        <p:style>
+          <a:lnRef idx="1">
+            <a:schemeClr val="accent1"/>
+          </a:lnRef>
+          <a:fillRef idx="3">
+            <a:schemeClr val="accent1"/>
+          </a:fillRef>
+          <a:effectRef idx="2">
+            <a:schemeClr val="accent1"/>
+          </a:effectRef>
+          <a:fontRef idx="minor">
+            <a:schemeClr val="lt1"/>
+          </a:fontRef>
+        </p:style>
+        <p:txBody>
+          <a:bodyPr rtlCol="0" anchor="ctr"/>
+          <a:lstStyle/>
+          <a:p>
+            <a:pPr algn="ctr"/>
+          </a:p>
+        </p:txBody>
+      </p:sp>
+      <p:sp>
+        <p:nvSpPr>
+          <p:cNvPr id="31" name="Rectangle 30"/>
+          <p:cNvSpPr/>
+          <p:nvPr/>
+        </p:nvSpPr>
+        <p:spPr>
+          <a:xfrm>
+            <a:off x="4311395" y="1819656"/>
+            <a:ext cx="886968" cy="36576"/>
+          </a:xfrm>
+          <a:prstGeom prst="rect">
+            <a:avLst/>
+          </a:prstGeom>
+          <a:solidFill>
+            <a:srgbClr val="F59E0B"/>
+          </a:solidFill>
+          <a:ln>
+            <a:noFill/>
+          </a:ln>
+        </p:spPr>
+        <p:style>
+          <a:lnRef idx="1">
+            <a:schemeClr val="accent1"/>
+          </a:lnRef>
+          <a:fillRef idx="3">
+            <a:schemeClr val="accent1"/>
+          </a:fillRef>
+          <a:effectRef idx="2">
+            <a:schemeClr val="accent1"/>
+          </a:effectRef>
+          <a:fontRef idx="minor">
+            <a:schemeClr val="lt1"/>
+          </a:fontRef>
+        </p:style>
+        <p:txBody>
+          <a:bodyPr rtlCol="0" anchor="ctr"/>
+          <a:lstStyle/>
+          <a:p>
+            <a:pPr algn="ctr"/>
+          </a:p>
+        </p:txBody>
+      </p:sp>
+      <p:sp>
+        <p:nvSpPr>
+          <p:cNvPr id="32" name="TextBox 31"/>
+          <p:cNvSpPr txBox="1"/>
+          <p:nvPr/>
+        </p:nvSpPr>
+        <p:spPr>
+          <a:xfrm>
+            <a:off x="4347971" y="1947672"/>
+            <a:ext cx="813816" cy="2560320"/>
+          </a:xfrm>
+          <a:prstGeom prst="rect">
+            <a:avLst/>
+          </a:prstGeom>
+          <a:noFill/>
+        </p:spPr>
+        <p:txBody>
+          <a:bodyPr wrap="square">
+            <a:spAutoFit/>
+          </a:bodyPr>
+          <a:lstStyle/>
+          <a:p>
+            <a:pPr>
+              <a:spcAft>
+                <a:spcPts val="300"/>
+              </a:spcAft>
+              <a:defRPr sz="850">
+                <a:solidFill>
+                  <a:srgbClr val="94A3B8"/>
+                </a:solidFill>
+                <a:latin typeface="Arial"/>
+              </a:defRPr>
+            </a:pPr>
+            <a:r>
+              <a:t>Renewal watcher</a:t>
+            </a:r>
+          </a:p>
+          <a:p>
+            <a:pPr>
+              <a:spcAft>
+                <a:spcPts val="300"/>
+              </a:spcAft>
+              <a:defRPr sz="850">
+                <a:solidFill>
+                  <a:srgbClr val="94A3B8"/>
+                </a:solidFill>
+                <a:latin typeface="Arial"/>
+              </a:defRPr>
+            </a:pPr>
+            <a:r>
+              <a:t>EBR/QBR creator</a:t>
+            </a:r>
+          </a:p>
+          <a:p>
+            <a:pPr>
+              <a:spcAft>
+                <a:spcPts val="300"/>
+              </a:spcAft>
+              <a:defRPr sz="850">
+                <a:solidFill>
+                  <a:srgbClr val="94A3B8"/>
+                </a:solidFill>
+                <a:latin typeface="Arial"/>
+              </a:defRPr>
+            </a:pPr>
+            <a:r>
+              <a:t>Churn prediction</a:t>
+            </a:r>
+          </a:p>
+          <a:p>
+            <a:pPr>
+              <a:spcAft>
+                <a:spcPts val="300"/>
+              </a:spcAft>
+              <a:defRPr sz="850">
+                <a:solidFill>
+                  <a:srgbClr val="94A3B8"/>
+                </a:solidFill>
+                <a:latin typeface="Arial"/>
+              </a:defRPr>
+            </a:pPr>
+            <a:r>
+              <a:t>Risk escalation</a:t>
+            </a:r>
+          </a:p>
+          <a:p>
+            <a:pPr>
+              <a:spcAft>
+                <a:spcPts val="300"/>
+              </a:spcAft>
+              <a:defRPr sz="850">
+                <a:solidFill>
+                  <a:srgbClr val="94A3B8"/>
+                </a:solidFill>
+                <a:latin typeface="Arial"/>
+              </a:defRPr>
+            </a:pPr>
+            <a:r>
+              <a:t>AI meeting prep</a:t>
+            </a:r>
+          </a:p>
+        </p:txBody>
+      </p:sp>
+      <p:sp>
+        <p:nvSpPr>
+          <p:cNvPr id="33" name="Rectangle 32"/>
+          <p:cNvSpPr/>
+          <p:nvPr/>
+        </p:nvSpPr>
+        <p:spPr>
+          <a:xfrm>
+            <a:off x="4809743" y="1097280"/>
+            <a:ext cx="941831" cy="18288"/>
+          </a:xfrm>
+          <a:prstGeom prst="rect">
+            <a:avLst/>
+          </a:prstGeom>
+          <a:solidFill>
+            <a:srgbClr val="334155"/>
+          </a:solidFill>
+          <a:ln>
+            <a:noFill/>
+          </a:ln>
+        </p:spPr>
+        <p:style>
+          <a:lnRef idx="1">
+            <a:schemeClr val="accent1"/>
+          </a:lnRef>
+          <a:fillRef idx="3">
+            <a:schemeClr val="accent1"/>
+          </a:fillRef>
+          <a:effectRef idx="2">
+            <a:schemeClr val="accent1"/>
+          </a:effectRef>
+          <a:fontRef idx="minor">
+            <a:schemeClr val="lt1"/>
+          </a:fontRef>
+        </p:style>
+        <p:txBody>
+          <a:bodyPr rtlCol="0" anchor="ctr"/>
+          <a:lstStyle/>
+          <a:p>
+            <a:pPr algn="ctr"/>
+          </a:p>
+        </p:txBody>
+      </p:sp>
+      <p:sp>
+        <p:nvSpPr>
+          <p:cNvPr id="34" name="Oval 33"/>
+          <p:cNvSpPr/>
+          <p:nvPr/>
+        </p:nvSpPr>
+        <p:spPr>
+          <a:xfrm>
+            <a:off x="5751576" y="1051560"/>
+            <a:ext cx="109728" cy="109728"/>
+          </a:xfrm>
+          <a:prstGeom prst="ellipse">
+            <a:avLst/>
+          </a:prstGeom>
+          <a:solidFill>
+            <a:srgbClr val="3B82F6"/>
+          </a:solidFill>
+          <a:ln>
+            <a:noFill/>
+          </a:ln>
+        </p:spPr>
+        <p:style>
+          <a:lnRef idx="1">
+            <a:schemeClr val="accent1"/>
+          </a:lnRef>
+          <a:fillRef idx="3">
+            <a:schemeClr val="accent1"/>
+          </a:fillRef>
+          <a:effectRef idx="2">
+            <a:schemeClr val="accent1"/>
+          </a:effectRef>
+          <a:fontRef idx="minor">
+            <a:schemeClr val="lt1"/>
+          </a:fontRef>
+        </p:style>
+        <p:txBody>
+          <a:bodyPr rtlCol="0" anchor="ctr"/>
+          <a:lstStyle/>
+          <a:p>
+            <a:pPr algn="ctr"/>
+          </a:p>
+        </p:txBody>
+      </p:sp>
+      <p:sp>
+        <p:nvSpPr>
+          <p:cNvPr id="35" name="TextBox 34"/>
+          <p:cNvSpPr txBox="1"/>
+          <p:nvPr/>
+        </p:nvSpPr>
+        <p:spPr>
+          <a:xfrm>
+            <a:off x="5303520" y="1216151"/>
+            <a:ext cx="1005840" cy="384048"/>
+          </a:xfrm>
+          <a:prstGeom prst="rect">
+            <a:avLst/>
+          </a:prstGeom>
+          <a:noFill/>
+        </p:spPr>
+        <p:txBody>
+          <a:bodyPr wrap="square">
+            <a:spAutoFit/>
+          </a:bodyPr>
+          <a:lstStyle/>
+          <a:p>
+            <a:pPr algn="ctr">
+              <a:defRPr sz="900" b="1">
+                <a:solidFill>
+                  <a:srgbClr val="F8FAFC"/>
+                </a:solidFill>
+                <a:latin typeface="Arial"/>
+              </a:defRPr>
+            </a:pPr>
+            <a:r>
+              <a:t>Expansion</a:t>
+            </a:r>
+          </a:p>
+        </p:txBody>
+      </p:sp>
+      <p:sp>
+        <p:nvSpPr>
+          <p:cNvPr id="36" name="Rounded Rectangle 35"/>
+          <p:cNvSpPr/>
+          <p:nvPr/>
+        </p:nvSpPr>
+        <p:spPr>
+          <a:xfrm>
+            <a:off x="5326379" y="1783080"/>
+            <a:ext cx="960120" cy="2834640"/>
+          </a:xfrm>
+          <a:prstGeom prst="roundRect">
+            <a:avLst/>
+          </a:prstGeom>
+          <a:solidFill>
+            <a:srgbClr val="1E293B"/>
+          </a:solidFill>
+          <a:ln w="6350">
+            <a:solidFill>
+              <a:srgbClr val="3B82F6"/>
+            </a:solidFill>
+          </a:ln>
+        </p:spPr>
+        <p:style>
+          <a:lnRef idx="1">
+            <a:schemeClr val="accent1"/>
+          </a:lnRef>
+          <a:fillRef idx="3">
+            <a:schemeClr val="accent1"/>
+          </a:fillRef>
+          <a:effectRef idx="2">
+            <a:schemeClr val="accent1"/>
+          </a:effectRef>
+          <a:fontRef idx="minor">
+            <a:schemeClr val="lt1"/>
+          </a:fontRef>
+        </p:style>
+        <p:txBody>
+          <a:bodyPr rtlCol="0" anchor="ctr"/>
+          <a:lstStyle/>
+          <a:p>
+            <a:pPr algn="ctr"/>
+          </a:p>
+        </p:txBody>
+      </p:sp>
+      <p:sp>
+        <p:nvSpPr>
+          <p:cNvPr id="37" name="Rectangle 36"/>
+          <p:cNvSpPr/>
+          <p:nvPr/>
+        </p:nvSpPr>
+        <p:spPr>
+          <a:xfrm>
+            <a:off x="5362955" y="1819656"/>
+            <a:ext cx="886968" cy="36576"/>
+          </a:xfrm>
+          <a:prstGeom prst="rect">
+            <a:avLst/>
+          </a:prstGeom>
+          <a:solidFill>
+            <a:srgbClr val="3B82F6"/>
+          </a:solidFill>
+          <a:ln>
+            <a:noFill/>
+          </a:ln>
+        </p:spPr>
+        <p:style>
+          <a:lnRef idx="1">
+            <a:schemeClr val="accent1"/>
+          </a:lnRef>
+          <a:fillRef idx="3">
+            <a:schemeClr val="accent1"/>
+          </a:fillRef>
+          <a:effectRef idx="2">
+            <a:schemeClr val="accent1"/>
+          </a:effectRef>
+          <a:fontRef idx="minor">
+            <a:schemeClr val="lt1"/>
+          </a:fontRef>
+        </p:style>
+        <p:txBody>
+          <a:bodyPr rtlCol="0" anchor="ctr"/>
+          <a:lstStyle/>
+          <a:p>
+            <a:pPr algn="ctr"/>
+          </a:p>
+        </p:txBody>
+      </p:sp>
+      <p:sp>
+        <p:nvSpPr>
+          <p:cNvPr id="38" name="TextBox 37"/>
+          <p:cNvSpPr txBox="1"/>
+          <p:nvPr/>
+        </p:nvSpPr>
+        <p:spPr>
+          <a:xfrm>
+            <a:off x="5399531" y="1947672"/>
+            <a:ext cx="813816" cy="2560320"/>
+          </a:xfrm>
+          <a:prstGeom prst="rect">
+            <a:avLst/>
+          </a:prstGeom>
+          <a:noFill/>
+        </p:spPr>
+        <p:txBody>
+          <a:bodyPr wrap="square">
+            <a:spAutoFit/>
+          </a:bodyPr>
+          <a:lstStyle/>
+          <a:p>
+            <a:pPr>
+              <a:spcAft>
+                <a:spcPts val="300"/>
+              </a:spcAft>
+              <a:defRPr sz="850">
+                <a:solidFill>
+                  <a:srgbClr val="94A3B8"/>
+                </a:solidFill>
+                <a:latin typeface="Arial"/>
+              </a:defRPr>
+            </a:pPr>
+            <a:r>
+              <a:t>CSQL pipeline</a:t>
+            </a:r>
+          </a:p>
+          <a:p>
+            <a:pPr>
+              <a:spcAft>
+                <a:spcPts val="300"/>
+              </a:spcAft>
+              <a:defRPr sz="850">
+                <a:solidFill>
+                  <a:srgbClr val="94A3B8"/>
+                </a:solidFill>
+                <a:latin typeface="Arial"/>
+              </a:defRPr>
+            </a:pPr>
+            <a:r>
+              <a:t>Expansion signals</a:t>
+            </a:r>
+          </a:p>
+          <a:p>
+            <a:pPr>
+              <a:spcAft>
+                <a:spcPts val="300"/>
+              </a:spcAft>
+              <a:defRPr sz="850">
+                <a:solidFill>
+                  <a:srgbClr val="94A3B8"/>
+                </a:solidFill>
+                <a:latin typeface="Arial"/>
+              </a:defRPr>
+            </a:pPr>
+            <a:r>
+              <a:t>Champion ID</a:t>
+            </a:r>
+          </a:p>
+          <a:p>
+            <a:pPr>
+              <a:spcAft>
+                <a:spcPts val="300"/>
+              </a:spcAft>
+              <a:defRPr sz="850">
+                <a:solidFill>
+                  <a:srgbClr val="94A3B8"/>
+                </a:solidFill>
+                <a:latin typeface="Arial"/>
+              </a:defRPr>
+            </a:pPr>
+            <a:r>
+              <a:t>Multi-threading</a:t>
+            </a:r>
+          </a:p>
+          <a:p>
+            <a:pPr>
+              <a:spcAft>
+                <a:spcPts val="300"/>
+              </a:spcAft>
+              <a:defRPr sz="850">
+                <a:solidFill>
+                  <a:srgbClr val="94A3B8"/>
+                </a:solidFill>
+                <a:latin typeface="Arial"/>
+              </a:defRPr>
+            </a:pPr>
+            <a:r>
+              <a:t>Growth tracking</a:t>
+            </a:r>
+          </a:p>
+        </p:txBody>
+      </p:sp>
+      <p:sp>
+        <p:nvSpPr>
+          <p:cNvPr id="39" name="Rectangle 38"/>
+          <p:cNvSpPr/>
+          <p:nvPr/>
+        </p:nvSpPr>
+        <p:spPr>
+          <a:xfrm>
+            <a:off x="5861303" y="1097280"/>
+            <a:ext cx="941831" cy="18288"/>
+          </a:xfrm>
+          <a:prstGeom prst="rect">
+            <a:avLst/>
+          </a:prstGeom>
+          <a:solidFill>
+            <a:srgbClr val="334155"/>
+          </a:solidFill>
+          <a:ln>
+            <a:noFill/>
+          </a:ln>
+        </p:spPr>
+        <p:style>
+          <a:lnRef idx="1">
+            <a:schemeClr val="accent1"/>
+          </a:lnRef>
+          <a:fillRef idx="3">
+            <a:schemeClr val="accent1"/>
+          </a:fillRef>
+          <a:effectRef idx="2">
+            <a:schemeClr val="accent1"/>
+          </a:effectRef>
+          <a:fontRef idx="minor">
+            <a:schemeClr val="lt1"/>
+          </a:fontRef>
+        </p:style>
+        <p:txBody>
+          <a:bodyPr rtlCol="0" anchor="ctr"/>
+          <a:lstStyle/>
+          <a:p>
+            <a:pPr algn="ctr"/>
+          </a:p>
+        </p:txBody>
+      </p:sp>
+      <p:sp>
+        <p:nvSpPr>
+          <p:cNvPr id="40" name="Oval 39"/>
+          <p:cNvSpPr/>
+          <p:nvPr/>
+        </p:nvSpPr>
+        <p:spPr>
+          <a:xfrm>
+            <a:off x="6803136" y="1051560"/>
+            <a:ext cx="109728" cy="109728"/>
+          </a:xfrm>
+          <a:prstGeom prst="ellipse">
+            <a:avLst/>
+          </a:prstGeom>
+          <a:solidFill>
+            <a:srgbClr val="DC2626"/>
+          </a:solidFill>
+          <a:ln>
+            <a:noFill/>
+          </a:ln>
+        </p:spPr>
+        <p:style>
+          <a:lnRef idx="1">
+            <a:schemeClr val="accent1"/>
+          </a:lnRef>
+          <a:fillRef idx="3">
+            <a:schemeClr val="accent1"/>
+          </a:fillRef>
+          <a:effectRef idx="2">
+            <a:schemeClr val="accent1"/>
+          </a:effectRef>
+          <a:fontRef idx="minor">
+            <a:schemeClr val="lt1"/>
+          </a:fontRef>
+        </p:style>
+        <p:txBody>
+          <a:bodyPr rtlCol="0" anchor="ctr"/>
+          <a:lstStyle/>
+          <a:p>
+            <a:pPr algn="ctr"/>
+          </a:p>
+        </p:txBody>
+      </p:sp>
+      <p:sp>
+        <p:nvSpPr>
+          <p:cNvPr id="41" name="TextBox 40"/>
+          <p:cNvSpPr txBox="1"/>
+          <p:nvPr/>
+        </p:nvSpPr>
+        <p:spPr>
+          <a:xfrm>
+            <a:off x="6355079" y="1216151"/>
+            <a:ext cx="1005840" cy="384048"/>
+          </a:xfrm>
+          <a:prstGeom prst="rect">
+            <a:avLst/>
+          </a:prstGeom>
+          <a:noFill/>
+        </p:spPr>
+        <p:txBody>
+          <a:bodyPr wrap="square">
+            <a:spAutoFit/>
+          </a:bodyPr>
+          <a:lstStyle/>
+          <a:p>
+            <a:pPr algn="ctr">
+              <a:defRPr sz="900" b="1">
+                <a:solidFill>
+                  <a:srgbClr val="F8FAFC"/>
+                </a:solidFill>
+                <a:latin typeface="Arial"/>
+              </a:defRPr>
+            </a:pPr>
+            <a:r>
+              <a:t>At-risk /</a:t>
+            </a:r>
+            <a:br/>
+            <a:r>
+              <a:t>recovery</a:t>
+            </a:r>
+          </a:p>
+        </p:txBody>
+      </p:sp>
+      <p:sp>
+        <p:nvSpPr>
+          <p:cNvPr id="42" name="Rounded Rectangle 41"/>
+          <p:cNvSpPr/>
+          <p:nvPr/>
+        </p:nvSpPr>
+        <p:spPr>
+          <a:xfrm>
+            <a:off x="6377939" y="1783080"/>
+            <a:ext cx="960120" cy="2834640"/>
+          </a:xfrm>
+          <a:prstGeom prst="roundRect">
+            <a:avLst/>
+          </a:prstGeom>
+          <a:solidFill>
+            <a:srgbClr val="1E293B"/>
+          </a:solidFill>
+          <a:ln w="6350">
+            <a:solidFill>
+              <a:srgbClr val="DC2626"/>
+            </a:solidFill>
+          </a:ln>
+        </p:spPr>
+        <p:style>
+          <a:lnRef idx="1">
+            <a:schemeClr val="accent1"/>
+          </a:lnRef>
+          <a:fillRef idx="3">
+            <a:schemeClr val="accent1"/>
+          </a:fillRef>
+          <a:effectRef idx="2">
+            <a:schemeClr val="accent1"/>
+          </a:effectRef>
+          <a:fontRef idx="minor">
+            <a:schemeClr val="lt1"/>
+          </a:fontRef>
+        </p:style>
+        <p:txBody>
+          <a:bodyPr rtlCol="0" anchor="ctr"/>
+          <a:lstStyle/>
+          <a:p>
+            <a:pPr algn="ctr"/>
+          </a:p>
+        </p:txBody>
+      </p:sp>
+      <p:sp>
+        <p:nvSpPr>
+          <p:cNvPr id="43" name="Rectangle 42"/>
+          <p:cNvSpPr/>
+          <p:nvPr/>
+        </p:nvSpPr>
+        <p:spPr>
+          <a:xfrm>
+            <a:off x="6414515" y="1819656"/>
+            <a:ext cx="886968" cy="36576"/>
+          </a:xfrm>
+          <a:prstGeom prst="rect">
+            <a:avLst/>
+          </a:prstGeom>
+          <a:solidFill>
+            <a:srgbClr val="DC2626"/>
+          </a:solidFill>
+          <a:ln>
+            <a:noFill/>
+          </a:ln>
+        </p:spPr>
+        <p:style>
+          <a:lnRef idx="1">
+            <a:schemeClr val="accent1"/>
+          </a:lnRef>
+          <a:fillRef idx="3">
+            <a:schemeClr val="accent1"/>
+          </a:fillRef>
+          <a:effectRef idx="2">
+            <a:schemeClr val="accent1"/>
+          </a:effectRef>
+          <a:fontRef idx="minor">
+            <a:schemeClr val="lt1"/>
+          </a:fontRef>
+        </p:style>
+        <p:txBody>
+          <a:bodyPr rtlCol="0" anchor="ctr"/>
+          <a:lstStyle/>
+          <a:p>
+            <a:pPr algn="ctr"/>
+          </a:p>
+        </p:txBody>
+      </p:sp>
+      <p:sp>
+        <p:nvSpPr>
+          <p:cNvPr id="44" name="TextBox 43"/>
+          <p:cNvSpPr txBox="1"/>
+          <p:nvPr/>
+        </p:nvSpPr>
+        <p:spPr>
+          <a:xfrm>
+            <a:off x="6451091" y="1947672"/>
+            <a:ext cx="813816" cy="2560320"/>
+          </a:xfrm>
+          <a:prstGeom prst="rect">
+            <a:avLst/>
+          </a:prstGeom>
+          <a:noFill/>
+        </p:spPr>
+        <p:txBody>
+          <a:bodyPr wrap="square">
+            <a:spAutoFit/>
+          </a:bodyPr>
+          <a:lstStyle/>
+          <a:p>
+            <a:pPr>
+              <a:spcAft>
+                <a:spcPts val="300"/>
+              </a:spcAft>
+              <a:defRPr sz="850">
+                <a:solidFill>
+                  <a:srgbClr val="94A3B8"/>
+                </a:solidFill>
+                <a:latin typeface="Arial"/>
+              </a:defRPr>
+            </a:pPr>
+            <a:r>
+              <a:t>Churn patterns</a:t>
+            </a:r>
+          </a:p>
+          <a:p>
+            <a:pPr>
+              <a:spcAft>
+                <a:spcPts val="300"/>
+              </a:spcAft>
+              <a:defRPr sz="850">
+                <a:solidFill>
+                  <a:srgbClr val="94A3B8"/>
+                </a:solidFill>
+                <a:latin typeface="Arial"/>
+              </a:defRPr>
+            </a:pPr>
+            <a:r>
+              <a:t>Churn Cascade</a:t>
+            </a:r>
+          </a:p>
+          <a:p>
+            <a:pPr>
+              <a:spcAft>
+                <a:spcPts val="300"/>
+              </a:spcAft>
+              <a:defRPr sz="850">
+                <a:solidFill>
+                  <a:srgbClr val="94A3B8"/>
+                </a:solidFill>
+                <a:latin typeface="Arial"/>
+              </a:defRPr>
+            </a:pPr>
+            <a:r>
+              <a:t>Rescue playbooks</a:t>
+            </a:r>
+          </a:p>
+          <a:p>
+            <a:pPr>
+              <a:spcAft>
+                <a:spcPts val="300"/>
+              </a:spcAft>
+              <a:defRPr sz="850">
+                <a:solidFill>
+                  <a:srgbClr val="94A3B8"/>
+                </a:solidFill>
+                <a:latin typeface="Arial"/>
+              </a:defRPr>
+            </a:pPr>
+            <a:r>
+              <a:t>Escalation workflows</a:t>
+            </a:r>
+          </a:p>
+          <a:p>
+            <a:pPr>
+              <a:spcAft>
+                <a:spcPts val="300"/>
+              </a:spcAft>
+              <a:defRPr sz="850">
+                <a:solidFill>
+                  <a:srgbClr val="94A3B8"/>
+                </a:solidFill>
+                <a:latin typeface="Arial"/>
+              </a:defRPr>
+            </a:pPr>
+            <a:r>
+              <a:t>Save plans</a:t>
+            </a:r>
+          </a:p>
+        </p:txBody>
+      </p:sp>
+      <p:sp>
+        <p:nvSpPr>
+          <p:cNvPr id="45" name="Rectangle 44"/>
+          <p:cNvSpPr/>
+          <p:nvPr/>
+        </p:nvSpPr>
+        <p:spPr>
+          <a:xfrm>
+            <a:off x="6912863" y="1097280"/>
+            <a:ext cx="941831" cy="18288"/>
+          </a:xfrm>
+          <a:prstGeom prst="rect">
+            <a:avLst/>
+          </a:prstGeom>
+          <a:solidFill>
+            <a:srgbClr val="334155"/>
+          </a:solidFill>
+          <a:ln>
+            <a:noFill/>
+          </a:ln>
+        </p:spPr>
+        <p:style>
+          <a:lnRef idx="1">
+            <a:schemeClr val="accent1"/>
+          </a:lnRef>
+          <a:fillRef idx="3">
+            <a:schemeClr val="accent1"/>
+          </a:fillRef>
+          <a:effectRef idx="2">
+            <a:schemeClr val="accent1"/>
+          </a:effectRef>
+          <a:fontRef idx="minor">
+            <a:schemeClr val="lt1"/>
+          </a:fontRef>
+        </p:style>
+        <p:txBody>
+          <a:bodyPr rtlCol="0" anchor="ctr"/>
+          <a:lstStyle/>
+          <a:p>
+            <a:pPr algn="ctr"/>
+          </a:p>
+        </p:txBody>
+      </p:sp>
+      <p:sp>
+        <p:nvSpPr>
+          <p:cNvPr id="46" name="Oval 45"/>
+          <p:cNvSpPr/>
+          <p:nvPr/>
+        </p:nvSpPr>
+        <p:spPr>
+          <a:xfrm>
+            <a:off x="7854695" y="1051560"/>
+            <a:ext cx="109728" cy="109728"/>
+          </a:xfrm>
+          <a:prstGeom prst="ellipse">
+            <a:avLst/>
+          </a:prstGeom>
+          <a:solidFill>
+            <a:srgbClr val="9F1239"/>
+          </a:solidFill>
+          <a:ln>
+            <a:noFill/>
+          </a:ln>
+        </p:spPr>
+        <p:style>
+          <a:lnRef idx="1">
+            <a:schemeClr val="accent1"/>
+          </a:lnRef>
+          <a:fillRef idx="3">
+            <a:schemeClr val="accent1"/>
+          </a:fillRef>
+          <a:effectRef idx="2">
+            <a:schemeClr val="accent1"/>
+          </a:effectRef>
+          <a:fontRef idx="minor">
+            <a:schemeClr val="lt1"/>
+          </a:fontRef>
+        </p:style>
+        <p:txBody>
+          <a:bodyPr rtlCol="0" anchor="ctr"/>
+          <a:lstStyle/>
+          <a:p>
+            <a:pPr algn="ctr"/>
+          </a:p>
+        </p:txBody>
+      </p:sp>
+      <p:sp>
+        <p:nvSpPr>
+          <p:cNvPr id="47" name="TextBox 46"/>
+          <p:cNvSpPr txBox="1"/>
+          <p:nvPr/>
+        </p:nvSpPr>
+        <p:spPr>
+          <a:xfrm>
+            <a:off x="7406639" y="1216151"/>
+            <a:ext cx="1005840" cy="384048"/>
+          </a:xfrm>
+          <a:prstGeom prst="rect">
+            <a:avLst/>
+          </a:prstGeom>
+          <a:noFill/>
+        </p:spPr>
+        <p:txBody>
+          <a:bodyPr wrap="square">
+            <a:spAutoFit/>
+          </a:bodyPr>
+          <a:lstStyle/>
+          <a:p>
+            <a:pPr algn="ctr">
+              <a:defRPr sz="900" b="1">
+                <a:solidFill>
+                  <a:srgbClr val="F8FAFC"/>
+                </a:solidFill>
+                <a:latin typeface="Arial"/>
+              </a:defRPr>
+            </a:pPr>
+            <a:r>
+              <a:t>Churn</a:t>
+            </a:r>
+            <a:br/>
+            <a:r>
+              <a:t>autopsy</a:t>
+            </a:r>
+          </a:p>
+        </p:txBody>
+      </p:sp>
+      <p:sp>
+        <p:nvSpPr>
+          <p:cNvPr id="48" name="Rounded Rectangle 47"/>
+          <p:cNvSpPr/>
+          <p:nvPr/>
+        </p:nvSpPr>
+        <p:spPr>
+          <a:xfrm>
+            <a:off x="7429499" y="1783080"/>
+            <a:ext cx="960120" cy="2834640"/>
+          </a:xfrm>
+          <a:prstGeom prst="roundRect">
+            <a:avLst/>
+          </a:prstGeom>
+          <a:solidFill>
+            <a:srgbClr val="1E293B"/>
+          </a:solidFill>
+          <a:ln w="6350">
+            <a:solidFill>
+              <a:srgbClr val="9F1239"/>
+            </a:solidFill>
+          </a:ln>
+        </p:spPr>
+        <p:style>
+          <a:lnRef idx="1">
+            <a:schemeClr val="accent1"/>
+          </a:lnRef>
+          <a:fillRef idx="3">
+            <a:schemeClr val="accent1"/>
+          </a:fillRef>
+          <a:effectRef idx="2">
+            <a:schemeClr val="accent1"/>
+          </a:effectRef>
+          <a:fontRef idx="minor">
+            <a:schemeClr val="lt1"/>
+          </a:fontRef>
+        </p:style>
+        <p:txBody>
+          <a:bodyPr rtlCol="0" anchor="ctr"/>
+          <a:lstStyle/>
+          <a:p>
+            <a:pPr algn="ctr"/>
+          </a:p>
+        </p:txBody>
+      </p:sp>
+      <p:sp>
+        <p:nvSpPr>
+          <p:cNvPr id="49" name="Rectangle 48"/>
+          <p:cNvSpPr/>
+          <p:nvPr/>
+        </p:nvSpPr>
+        <p:spPr>
+          <a:xfrm>
+            <a:off x="7466075" y="1819656"/>
+            <a:ext cx="886968" cy="36576"/>
+          </a:xfrm>
+          <a:prstGeom prst="rect">
+            <a:avLst/>
+          </a:prstGeom>
+          <a:solidFill>
+            <a:srgbClr val="9F1239"/>
+          </a:solidFill>
+          <a:ln>
+            <a:noFill/>
+          </a:ln>
+        </p:spPr>
+        <p:style>
+          <a:lnRef idx="1">
+            <a:schemeClr val="accent1"/>
+          </a:lnRef>
+          <a:fillRef idx="3">
+            <a:schemeClr val="accent1"/>
+          </a:fillRef>
+          <a:effectRef idx="2">
+            <a:schemeClr val="accent1"/>
+          </a:effectRef>
+          <a:fontRef idx="minor">
+            <a:schemeClr val="lt1"/>
+          </a:fontRef>
+        </p:style>
+        <p:txBody>
+          <a:bodyPr rtlCol="0" anchor="ctr"/>
+          <a:lstStyle/>
+          <a:p>
+            <a:pPr algn="ctr"/>
+          </a:p>
+        </p:txBody>
+      </p:sp>
+      <p:sp>
+        <p:nvSpPr>
+          <p:cNvPr id="50" name="TextBox 49"/>
+          <p:cNvSpPr txBox="1"/>
+          <p:nvPr/>
+        </p:nvSpPr>
+        <p:spPr>
+          <a:xfrm>
+            <a:off x="7502651" y="1947672"/>
+            <a:ext cx="813816" cy="2560320"/>
+          </a:xfrm>
+          <a:prstGeom prst="rect">
+            <a:avLst/>
+          </a:prstGeom>
+          <a:noFill/>
+        </p:spPr>
+        <p:txBody>
+          <a:bodyPr wrap="square">
+            <a:spAutoFit/>
+          </a:bodyPr>
+          <a:lstStyle/>
+          <a:p>
+            <a:pPr>
+              <a:spcAft>
+                <a:spcPts val="300"/>
+              </a:spcAft>
+              <a:defRPr sz="850">
+                <a:solidFill>
+                  <a:srgbClr val="94A3B8"/>
+                </a:solidFill>
+                <a:latin typeface="Arial"/>
+              </a:defRPr>
+            </a:pPr>
+            <a:r>
+              <a:t>Post-churn analysis</a:t>
+            </a:r>
+          </a:p>
+          <a:p>
+            <a:pPr>
+              <a:spcAft>
+                <a:spcPts val="300"/>
+              </a:spcAft>
+              <a:defRPr sz="850">
+                <a:solidFill>
+                  <a:srgbClr val="94A3B8"/>
+                </a:solidFill>
+                <a:latin typeface="Arial"/>
+              </a:defRPr>
+            </a:pPr>
+            <a:r>
+              <a:t>Pattern library</a:t>
+            </a:r>
+          </a:p>
+          <a:p>
+            <a:pPr>
+              <a:spcAft>
+                <a:spcPts val="300"/>
+              </a:spcAft>
+              <a:defRPr sz="850">
+                <a:solidFill>
+                  <a:srgbClr val="94A3B8"/>
+                </a:solidFill>
+                <a:latin typeface="Arial"/>
+              </a:defRPr>
+            </a:pPr>
+            <a:r>
+              <a:t>Could-have-saved</a:t>
+            </a:r>
+          </a:p>
+          <a:p>
+            <a:pPr>
+              <a:spcAft>
+                <a:spcPts val="300"/>
+              </a:spcAft>
+              <a:defRPr sz="850">
+                <a:solidFill>
+                  <a:srgbClr val="94A3B8"/>
+                </a:solidFill>
+                <a:latin typeface="Arial"/>
+              </a:defRPr>
+            </a:pPr>
+            <a:r>
+              <a:t>Feeds prediction</a:t>
+            </a:r>
+          </a:p>
+        </p:txBody>
+      </p:sp>
+      <p:sp>
+        <p:nvSpPr>
+          <p:cNvPr id="51" name="TextBox 50"/>
+          <p:cNvSpPr txBox="1"/>
+          <p:nvPr/>
+        </p:nvSpPr>
+        <p:spPr>
+          <a:xfrm>
+            <a:off x="457200" y="4754880"/>
+            <a:ext cx="8229600" cy="274320"/>
+          </a:xfrm>
+          <a:prstGeom prst="rect">
+            <a:avLst/>
+          </a:prstGeom>
+          <a:noFill/>
+        </p:spPr>
+        <p:txBody>
+          <a:bodyPr wrap="none">
+            <a:spAutoFit/>
+          </a:bodyPr>
+          <a:lstStyle/>
+          <a:p>
+            <a:pPr algn="r">
+              <a:defRPr sz="900">
+                <a:solidFill>
+                  <a:srgbClr val="3B82F6"/>
+                </a:solidFill>
+                <a:latin typeface="Arial"/>
+              </a:defRPr>
+            </a:pPr>
+            <a:r>
+              <a:t>CCOPilot.ai</a:t>
+            </a:r>
           </a:p>
         </p:txBody>
       </p:sp>
